--- a/readme/diagrams.pptx
+++ b/readme/diagrams.pptx
@@ -108,6 +108,11 @@
       </a:defRPr>
     </a:lvl9pPr>
   </p:defaultTextStyle>
+  <p:extLst>
+    <p:ext uri="{EFAFB233-063F-42B5-8137-9DF3F51BA10A}">
+      <p15:sldGuideLst xmlns:p15="http://schemas.microsoft.com/office/powerpoint/2012/main"/>
+    </p:ext>
+  </p:extLst>
 </p:presentation>
 </file>
 
@@ -3780,10 +3785,10 @@
       </p:sp>
       <p:cxnSp>
         <p:nvCxnSpPr>
-          <p:cNvPr id="32" name="Straight Arrow Connector 31">
-            <a:extLst>
-              <a:ext uri="{FF2B5EF4-FFF2-40B4-BE49-F238E27FC236}">
-                <a16:creationId xmlns:a16="http://schemas.microsoft.com/office/drawing/2014/main" id="{264CA6C8-7B44-4CC0-BA33-114BE0C61246}"/>
+          <p:cNvPr id="34" name="Straight Arrow Connector 33">
+            <a:extLst>
+              <a:ext uri="{FF2B5EF4-FFF2-40B4-BE49-F238E27FC236}">
+                <a16:creationId xmlns:a16="http://schemas.microsoft.com/office/drawing/2014/main" id="{C22DD34B-B0E7-44E9-98A0-6C4C3DF613F2}"/>
               </a:ext>
             </a:extLst>
           </p:cNvPr>
@@ -3793,8 +3798,8 @@
           <p:nvPr/>
         </p:nvCxnSpPr>
         <p:spPr>
-          <a:xfrm>
-            <a:off x="2107871" y="3049979"/>
+          <a:xfrm flipH="1">
+            <a:off x="2107871" y="3671454"/>
             <a:ext cx="8168244" cy="0"/>
           </a:xfrm>
           <a:prstGeom prst="straightConnector1">
@@ -3824,10 +3829,10 @@
       </p:cxnSp>
       <p:sp>
         <p:nvSpPr>
-          <p:cNvPr id="33" name="Rectangle 32">
-            <a:extLst>
-              <a:ext uri="{FF2B5EF4-FFF2-40B4-BE49-F238E27FC236}">
-                <a16:creationId xmlns:a16="http://schemas.microsoft.com/office/drawing/2014/main" id="{54032575-5EFE-4812-8554-4516154A5420}"/>
+          <p:cNvPr id="35" name="Rectangle 34">
+            <a:extLst>
+              <a:ext uri="{FF2B5EF4-FFF2-40B4-BE49-F238E27FC236}">
+                <a16:creationId xmlns:a16="http://schemas.microsoft.com/office/drawing/2014/main" id="{C3D0FA7B-3676-4A08-8015-85C88AB97462}"/>
               </a:ext>
             </a:extLst>
           </p:cNvPr>
@@ -3836,8 +3841,8 @@
         </p:nvSpPr>
         <p:spPr>
           <a:xfrm>
-            <a:off x="5403274" y="2812472"/>
-            <a:ext cx="1385452" cy="475013"/>
+            <a:off x="5246915" y="3427019"/>
+            <a:ext cx="1698170" cy="475013"/>
           </a:xfrm>
           <a:prstGeom prst="rect">
             <a:avLst/>
@@ -3876,7 +3881,7 @@
                   <a:schemeClr val="tx1"/>
                 </a:solidFill>
               </a:rPr>
-              <a:t>Player credentials</a:t>
+              <a:t>Authorization result</a:t>
             </a:r>
             <a:endParaRPr lang="en-GB" sz="1200">
               <a:solidFill>
@@ -3886,12 +3891,76 @@
           </a:p>
         </p:txBody>
       </p:sp>
+      <p:sp>
+        <p:nvSpPr>
+          <p:cNvPr id="36" name="Rectangle 35">
+            <a:extLst>
+              <a:ext uri="{FF2B5EF4-FFF2-40B4-BE49-F238E27FC236}">
+                <a16:creationId xmlns:a16="http://schemas.microsoft.com/office/drawing/2014/main" id="{76D2121E-2BDA-477D-9B53-52D5320D30F9}"/>
+              </a:ext>
+            </a:extLst>
+          </p:cNvPr>
+          <p:cNvSpPr/>
+          <p:nvPr/>
+        </p:nvSpPr>
+        <p:spPr>
+          <a:xfrm>
+            <a:off x="4557156" y="100942"/>
+            <a:ext cx="3077688" cy="475013"/>
+          </a:xfrm>
+          <a:prstGeom prst="rect">
+            <a:avLst/>
+          </a:prstGeom>
+          <a:solidFill>
+            <a:schemeClr val="bg1"/>
+          </a:solidFill>
+          <a:ln w="25400">
+            <a:noFill/>
+          </a:ln>
+        </p:spPr>
+        <p:style>
+          <a:lnRef idx="2">
+            <a:schemeClr val="accent1">
+              <a:shade val="50000"/>
+            </a:schemeClr>
+          </a:lnRef>
+          <a:fillRef idx="1">
+            <a:schemeClr val="accent1"/>
+          </a:fillRef>
+          <a:effectRef idx="0">
+            <a:schemeClr val="accent1"/>
+          </a:effectRef>
+          <a:fontRef idx="minor">
+            <a:schemeClr val="lt1"/>
+          </a:fontRef>
+        </p:style>
+        <p:txBody>
+          <a:bodyPr rtlCol="0" anchor="ctr"/>
+          <a:lstStyle/>
+          <a:p>
+            <a:pPr algn="ctr"/>
+            <a:r>
+              <a:rPr lang="en-US">
+                <a:solidFill>
+                  <a:schemeClr val="tx1"/>
+                </a:solidFill>
+              </a:rPr>
+              <a:t>Connection diagram</a:t>
+            </a:r>
+            <a:endParaRPr lang="en-GB">
+              <a:solidFill>
+                <a:schemeClr val="tx1"/>
+              </a:solidFill>
+            </a:endParaRPr>
+          </a:p>
+        </p:txBody>
+      </p:sp>
       <p:cxnSp>
         <p:nvCxnSpPr>
-          <p:cNvPr id="34" name="Straight Arrow Connector 33">
-            <a:extLst>
-              <a:ext uri="{FF2B5EF4-FFF2-40B4-BE49-F238E27FC236}">
-                <a16:creationId xmlns:a16="http://schemas.microsoft.com/office/drawing/2014/main" id="{C22DD34B-B0E7-44E9-98A0-6C4C3DF613F2}"/>
+          <p:cNvPr id="42" name="Straight Arrow Connector 41">
+            <a:extLst>
+              <a:ext uri="{FF2B5EF4-FFF2-40B4-BE49-F238E27FC236}">
+                <a16:creationId xmlns:a16="http://schemas.microsoft.com/office/drawing/2014/main" id="{163C9F28-354B-4C8E-9C2D-03669D0CD4B1}"/>
               </a:ext>
             </a:extLst>
           </p:cNvPr>
@@ -3901,8 +3970,8 @@
           <p:nvPr/>
         </p:nvCxnSpPr>
         <p:spPr>
-          <a:xfrm flipH="1">
-            <a:off x="2107871" y="3671454"/>
+          <a:xfrm>
+            <a:off x="2107871" y="3095500"/>
             <a:ext cx="8168244" cy="0"/>
           </a:xfrm>
           <a:prstGeom prst="straightConnector1">
@@ -3932,10 +4001,10 @@
       </p:cxnSp>
       <p:sp>
         <p:nvSpPr>
-          <p:cNvPr id="35" name="Rectangle 34">
-            <a:extLst>
-              <a:ext uri="{FF2B5EF4-FFF2-40B4-BE49-F238E27FC236}">
-                <a16:creationId xmlns:a16="http://schemas.microsoft.com/office/drawing/2014/main" id="{C3D0FA7B-3676-4A08-8015-85C88AB97462}"/>
+          <p:cNvPr id="43" name="Rectangle 42">
+            <a:extLst>
+              <a:ext uri="{FF2B5EF4-FFF2-40B4-BE49-F238E27FC236}">
+                <a16:creationId xmlns:a16="http://schemas.microsoft.com/office/drawing/2014/main" id="{27054E0B-4E70-44C2-999A-088E9786A997}"/>
               </a:ext>
             </a:extLst>
           </p:cNvPr>
@@ -3944,8 +4013,8 @@
         </p:nvSpPr>
         <p:spPr>
           <a:xfrm>
-            <a:off x="5246915" y="3433947"/>
-            <a:ext cx="1698170" cy="475013"/>
+            <a:off x="5046518" y="2881746"/>
+            <a:ext cx="2098963" cy="475013"/>
           </a:xfrm>
           <a:prstGeom prst="rect">
             <a:avLst/>
@@ -3984,223 +4053,7 @@
                   <a:schemeClr val="tx1"/>
                 </a:solidFill>
               </a:rPr>
-              <a:t>Authorization result</a:t>
-            </a:r>
-            <a:endParaRPr lang="en-GB" sz="1200">
-              <a:solidFill>
-                <a:schemeClr val="tx1"/>
-              </a:solidFill>
-            </a:endParaRPr>
-          </a:p>
-        </p:txBody>
-      </p:sp>
-      <p:sp>
-        <p:nvSpPr>
-          <p:cNvPr id="36" name="Rectangle 35">
-            <a:extLst>
-              <a:ext uri="{FF2B5EF4-FFF2-40B4-BE49-F238E27FC236}">
-                <a16:creationId xmlns:a16="http://schemas.microsoft.com/office/drawing/2014/main" id="{76D2121E-2BDA-477D-9B53-52D5320D30F9}"/>
-              </a:ext>
-            </a:extLst>
-          </p:cNvPr>
-          <p:cNvSpPr/>
-          <p:nvPr/>
-        </p:nvSpPr>
-        <p:spPr>
-          <a:xfrm>
-            <a:off x="4557156" y="100942"/>
-            <a:ext cx="3077688" cy="475013"/>
-          </a:xfrm>
-          <a:prstGeom prst="rect">
-            <a:avLst/>
-          </a:prstGeom>
-          <a:solidFill>
-            <a:schemeClr val="bg1"/>
-          </a:solidFill>
-          <a:ln w="25400">
-            <a:noFill/>
-          </a:ln>
-        </p:spPr>
-        <p:style>
-          <a:lnRef idx="2">
-            <a:schemeClr val="accent1">
-              <a:shade val="50000"/>
-            </a:schemeClr>
-          </a:lnRef>
-          <a:fillRef idx="1">
-            <a:schemeClr val="accent1"/>
-          </a:fillRef>
-          <a:effectRef idx="0">
-            <a:schemeClr val="accent1"/>
-          </a:effectRef>
-          <a:fontRef idx="minor">
-            <a:schemeClr val="lt1"/>
-          </a:fontRef>
-        </p:style>
-        <p:txBody>
-          <a:bodyPr rtlCol="0" anchor="ctr"/>
-          <a:lstStyle/>
-          <a:p>
-            <a:pPr algn="ctr"/>
-            <a:r>
-              <a:rPr lang="en-US">
-                <a:solidFill>
-                  <a:schemeClr val="tx1"/>
-                </a:solidFill>
-              </a:rPr>
-              <a:t>Connection diagram</a:t>
-            </a:r>
-            <a:endParaRPr lang="en-GB">
-              <a:solidFill>
-                <a:schemeClr val="tx1"/>
-              </a:solidFill>
-            </a:endParaRPr>
-          </a:p>
-        </p:txBody>
-      </p:sp>
-      <p:cxnSp>
-        <p:nvCxnSpPr>
-          <p:cNvPr id="41" name="Straight Arrow Connector 40">
-            <a:extLst>
-              <a:ext uri="{FF2B5EF4-FFF2-40B4-BE49-F238E27FC236}">
-                <a16:creationId xmlns:a16="http://schemas.microsoft.com/office/drawing/2014/main" id="{84FFB055-FC9E-4357-8ED1-1CA52298E720}"/>
-              </a:ext>
-            </a:extLst>
-          </p:cNvPr>
-          <p:cNvCxnSpPr>
-            <a:cxnSpLocks/>
-          </p:cNvCxnSpPr>
-          <p:nvPr/>
-        </p:nvCxnSpPr>
-        <p:spPr>
-          <a:xfrm flipH="1">
-            <a:off x="2107871" y="3489365"/>
-            <a:ext cx="8168244" cy="0"/>
-          </a:xfrm>
-          <a:prstGeom prst="straightConnector1">
-            <a:avLst/>
-          </a:prstGeom>
-          <a:ln w="25400">
-            <a:solidFill>
-              <a:schemeClr val="tx1"/>
-            </a:solidFill>
-            <a:tailEnd type="triangle"/>
-          </a:ln>
-        </p:spPr>
-        <p:style>
-          <a:lnRef idx="1">
-            <a:schemeClr val="accent1"/>
-          </a:lnRef>
-          <a:fillRef idx="0">
-            <a:schemeClr val="accent1"/>
-          </a:fillRef>
-          <a:effectRef idx="0">
-            <a:schemeClr val="accent1"/>
-          </a:effectRef>
-          <a:fontRef idx="minor">
-            <a:schemeClr val="tx1"/>
-          </a:fontRef>
-        </p:style>
-      </p:cxnSp>
-      <p:cxnSp>
-        <p:nvCxnSpPr>
-          <p:cNvPr id="42" name="Straight Arrow Connector 41">
-            <a:extLst>
-              <a:ext uri="{FF2B5EF4-FFF2-40B4-BE49-F238E27FC236}">
-                <a16:creationId xmlns:a16="http://schemas.microsoft.com/office/drawing/2014/main" id="{163C9F28-354B-4C8E-9C2D-03669D0CD4B1}"/>
-              </a:ext>
-            </a:extLst>
-          </p:cNvPr>
-          <p:cNvCxnSpPr>
-            <a:cxnSpLocks/>
-          </p:cNvCxnSpPr>
-          <p:nvPr/>
-        </p:nvCxnSpPr>
-        <p:spPr>
-          <a:xfrm>
-            <a:off x="2107871" y="2907475"/>
-            <a:ext cx="8168244" cy="0"/>
-          </a:xfrm>
-          <a:prstGeom prst="straightConnector1">
-            <a:avLst/>
-          </a:prstGeom>
-          <a:ln w="25400">
-            <a:solidFill>
-              <a:schemeClr val="tx1"/>
-            </a:solidFill>
-            <a:tailEnd type="triangle"/>
-          </a:ln>
-        </p:spPr>
-        <p:style>
-          <a:lnRef idx="1">
-            <a:schemeClr val="accent1"/>
-          </a:lnRef>
-          <a:fillRef idx="0">
-            <a:schemeClr val="accent1"/>
-          </a:fillRef>
-          <a:effectRef idx="0">
-            <a:schemeClr val="accent1"/>
-          </a:effectRef>
-          <a:fontRef idx="minor">
-            <a:schemeClr val="tx1"/>
-          </a:fontRef>
-        </p:style>
-      </p:cxnSp>
-      <p:sp>
-        <p:nvSpPr>
-          <p:cNvPr id="43" name="Rectangle 42">
-            <a:extLst>
-              <a:ext uri="{FF2B5EF4-FFF2-40B4-BE49-F238E27FC236}">
-                <a16:creationId xmlns:a16="http://schemas.microsoft.com/office/drawing/2014/main" id="{27054E0B-4E70-44C2-999A-088E9786A997}"/>
-              </a:ext>
-            </a:extLst>
-          </p:cNvPr>
-          <p:cNvSpPr/>
-          <p:nvPr/>
-        </p:nvSpPr>
-        <p:spPr>
-          <a:xfrm>
-            <a:off x="5142512" y="2669968"/>
-            <a:ext cx="2098963" cy="475013"/>
-          </a:xfrm>
-          <a:prstGeom prst="rect">
-            <a:avLst/>
-          </a:prstGeom>
-          <a:solidFill>
-            <a:schemeClr val="bg1"/>
-          </a:solidFill>
-          <a:ln w="25400">
-            <a:noFill/>
-          </a:ln>
-        </p:spPr>
-        <p:style>
-          <a:lnRef idx="2">
-            <a:schemeClr val="accent1">
-              <a:shade val="50000"/>
-            </a:schemeClr>
-          </a:lnRef>
-          <a:fillRef idx="1">
-            <a:schemeClr val="accent1"/>
-          </a:fillRef>
-          <a:effectRef idx="0">
-            <a:schemeClr val="accent1"/>
-          </a:effectRef>
-          <a:fontRef idx="minor">
-            <a:schemeClr val="lt1"/>
-          </a:fontRef>
-        </p:style>
-        <p:txBody>
-          <a:bodyPr rtlCol="0" anchor="ctr"/>
-          <a:lstStyle/>
-          <a:p>
-            <a:pPr algn="ctr"/>
-            <a:r>
-              <a:rPr lang="en-US" sz="1200">
-                <a:solidFill>
-                  <a:schemeClr val="tx1"/>
-                </a:solidFill>
-              </a:rPr>
-              <a:t>Performance test request</a:t>
+              <a:t>Authorization request</a:t>
             </a:r>
             <a:endParaRPr lang="en-GB" sz="1200">
               <a:solidFill>
